--- a/reports/13-incident-report.pptx
+++ b/reports/13-incident-report.pptx
@@ -107,7 +107,7 @@
   <p:extLst>
     <p:ext uri="{521415D9-36F7-43E2-AB2F-B90AF26B5E84}">
       <p14:sectionLst xmlns:p14="http://schemas.microsoft.com/office/powerpoint/2010/main">
-        <p14:section name="Incident report" id="{79353be9-2d97-0265-0ab7-2fb4a47699ff}">
+        <p14:section name="Incident report" id="{82e47602-98ec-2e27-b37d-8a74a2702207}">
           <p14:sldIdLst>
             <p14:sldId id="256"/>
           </p14:sldIdLst>
@@ -1130,11 +1130,11 @@
         <p:spPr>
           <a:xfrm>
             <a:off x="457200" y="1783080"/>
-            <a:ext cx="2647874" cy="960120"/>
+            <a:ext cx="2647874" cy="914400"/>
           </a:xfrm>
           <a:prstGeom prst="roundRect">
             <a:avLst>
-              <a:gd name="adj" fmla="val 7619"/>
+              <a:gd name="adj" fmla="val 8000"/>
             </a:avLst>
           </a:prstGeom>
           <a:solidFill>
@@ -1187,7 +1187,7 @@
         </p:nvSpPr>
         <p:spPr>
           <a:xfrm>
-            <a:off x="640080" y="2075688"/>
+            <a:off x="640080" y="2057400"/>
             <a:ext cx="2282114" cy="411480"/>
           </a:xfrm>
           <a:prstGeom prst="rect">
@@ -1223,7 +1223,7 @@
         </p:nvSpPr>
         <p:spPr>
           <a:xfrm>
-            <a:off x="640080" y="2478024"/>
+            <a:off x="640080" y="2441448"/>
             <a:ext cx="2282114" cy="228600"/>
           </a:xfrm>
           <a:prstGeom prst="rect">
@@ -1260,11 +1260,11 @@
         <p:spPr>
           <a:xfrm>
             <a:off x="3333674" y="1783080"/>
-            <a:ext cx="2647874" cy="960120"/>
+            <a:ext cx="2647874" cy="914400"/>
           </a:xfrm>
           <a:prstGeom prst="roundRect">
             <a:avLst>
-              <a:gd name="adj" fmla="val 7619"/>
+              <a:gd name="adj" fmla="val 8000"/>
             </a:avLst>
           </a:prstGeom>
           <a:solidFill>
@@ -1317,7 +1317,7 @@
         </p:nvSpPr>
         <p:spPr>
           <a:xfrm>
-            <a:off x="3516554" y="2075688"/>
+            <a:off x="3516554" y="2057400"/>
             <a:ext cx="2282114" cy="411480"/>
           </a:xfrm>
           <a:prstGeom prst="rect">
@@ -1353,7 +1353,7 @@
         </p:nvSpPr>
         <p:spPr>
           <a:xfrm>
-            <a:off x="3516554" y="2478024"/>
+            <a:off x="3516554" y="2441448"/>
             <a:ext cx="2282114" cy="228600"/>
           </a:xfrm>
           <a:prstGeom prst="rect">
@@ -1390,11 +1390,11 @@
         <p:spPr>
           <a:xfrm>
             <a:off x="6210148" y="1783080"/>
-            <a:ext cx="2647874" cy="960120"/>
+            <a:ext cx="2647874" cy="914400"/>
           </a:xfrm>
           <a:prstGeom prst="roundRect">
             <a:avLst>
-              <a:gd name="adj" fmla="val 7619"/>
+              <a:gd name="adj" fmla="val 8000"/>
             </a:avLst>
           </a:prstGeom>
           <a:solidFill>
@@ -1447,7 +1447,7 @@
         </p:nvSpPr>
         <p:spPr>
           <a:xfrm>
-            <a:off x="6393028" y="2075688"/>
+            <a:off x="6393028" y="2057400"/>
             <a:ext cx="2282114" cy="411480"/>
           </a:xfrm>
           <a:prstGeom prst="rect">
@@ -1483,7 +1483,7 @@
         </p:nvSpPr>
         <p:spPr>
           <a:xfrm>
-            <a:off x="6393028" y="2478024"/>
+            <a:off x="6393028" y="2441448"/>
             <a:ext cx="2282114" cy="228600"/>
           </a:xfrm>
           <a:prstGeom prst="rect">
@@ -1520,11 +1520,11 @@
         <p:spPr>
           <a:xfrm>
             <a:off x="9086621" y="1783080"/>
-            <a:ext cx="2647874" cy="960120"/>
+            <a:ext cx="2647874" cy="914400"/>
           </a:xfrm>
           <a:prstGeom prst="roundRect">
             <a:avLst>
-              <a:gd name="adj" fmla="val 7619"/>
+              <a:gd name="adj" fmla="val 8000"/>
             </a:avLst>
           </a:prstGeom>
           <a:solidFill>
@@ -1577,7 +1577,7 @@
         </p:nvSpPr>
         <p:spPr>
           <a:xfrm>
-            <a:off x="9269501" y="2075688"/>
+            <a:off x="9269501" y="2057400"/>
             <a:ext cx="2282114" cy="411480"/>
           </a:xfrm>
           <a:prstGeom prst="rect">
@@ -1613,7 +1613,7 @@
         </p:nvSpPr>
         <p:spPr>
           <a:xfrm>
-            <a:off x="9269501" y="2478024"/>
+            <a:off x="9269501" y="2441448"/>
             <a:ext cx="2282114" cy="228600"/>
           </a:xfrm>
           <a:prstGeom prst="rect">
@@ -1649,7 +1649,7 @@
         </p:nvSpPr>
         <p:spPr>
           <a:xfrm>
-            <a:off x="731520" y="3246120"/>
+            <a:off x="731520" y="3154680"/>
             <a:ext cx="10728655" cy="0"/>
           </a:xfrm>
           <a:prstGeom prst="line">
@@ -1672,7 +1672,7 @@
         </p:nvSpPr>
         <p:spPr>
           <a:xfrm>
-            <a:off x="630936" y="3145536"/>
+            <a:off x="630936" y="3054096"/>
             <a:ext cx="201168" cy="201168"/>
           </a:xfrm>
           <a:prstGeom prst="ellipse">
@@ -1697,8 +1697,8 @@
         </p:nvSpPr>
         <p:spPr>
           <a:xfrm>
-            <a:off x="0" y="2862072"/>
-            <a:ext cx="1463040" cy="228600"/>
+            <a:off x="457200" y="2788920"/>
+            <a:ext cx="1828800" cy="228600"/>
           </a:xfrm>
           <a:prstGeom prst="rect">
             <a:avLst/>
@@ -1710,7 +1710,7 @@
           <a:bodyPr wrap="square" lIns="0" tIns="0" rIns="0" bIns="0" rtlCol="0" anchor="t"/>
           <a:lstStyle/>
           <a:p>
-            <a:pPr algn="ctr" indent="0" marL="0">
+            <a:pPr algn="l" indent="0" marL="0">
               <a:buNone/>
             </a:pPr>
             <a:r>
@@ -1733,8 +1733,8 @@
         </p:nvSpPr>
         <p:spPr>
           <a:xfrm>
-            <a:off x="-365760" y="3429000"/>
-            <a:ext cx="2194560" cy="640080"/>
+            <a:off x="457200" y="3337560"/>
+            <a:ext cx="1828800" cy="594360"/>
           </a:xfrm>
           <a:prstGeom prst="rect">
             <a:avLst/>
@@ -1746,7 +1746,7 @@
           <a:bodyPr wrap="square" lIns="0" tIns="0" rIns="0" bIns="0" rtlCol="0" anchor="t"/>
           <a:lstStyle/>
           <a:p>
-            <a:pPr algn="ctr" indent="0" marL="0">
+            <a:pPr algn="l" indent="0" marL="0">
               <a:buNone/>
             </a:pPr>
             <a:r>
@@ -1769,7 +1769,7 @@
         </p:nvSpPr>
         <p:spPr>
           <a:xfrm>
-            <a:off x="3313100" y="3145536"/>
+            <a:off x="3313100" y="3054096"/>
             <a:ext cx="201168" cy="201168"/>
           </a:xfrm>
           <a:prstGeom prst="ellipse">
@@ -1794,8 +1794,8 @@
         </p:nvSpPr>
         <p:spPr>
           <a:xfrm>
-            <a:off x="2682164" y="2862072"/>
-            <a:ext cx="1463040" cy="228600"/>
+            <a:off x="2499284" y="2788920"/>
+            <a:ext cx="1828800" cy="228600"/>
           </a:xfrm>
           <a:prstGeom prst="rect">
             <a:avLst/>
@@ -1830,8 +1830,8 @@
         </p:nvSpPr>
         <p:spPr>
           <a:xfrm>
-            <a:off x="2316404" y="3429000"/>
-            <a:ext cx="2194560" cy="640080"/>
+            <a:off x="2499284" y="3337560"/>
+            <a:ext cx="1828800" cy="594360"/>
           </a:xfrm>
           <a:prstGeom prst="rect">
             <a:avLst/>
@@ -1866,7 +1866,7 @@
         </p:nvSpPr>
         <p:spPr>
           <a:xfrm>
-            <a:off x="5995264" y="3145536"/>
+            <a:off x="5995264" y="3054096"/>
             <a:ext cx="201168" cy="201168"/>
           </a:xfrm>
           <a:prstGeom prst="ellipse">
@@ -1891,8 +1891,8 @@
         </p:nvSpPr>
         <p:spPr>
           <a:xfrm>
-            <a:off x="5364328" y="2862072"/>
-            <a:ext cx="1463040" cy="228600"/>
+            <a:off x="5181448" y="2788920"/>
+            <a:ext cx="1828800" cy="228600"/>
           </a:xfrm>
           <a:prstGeom prst="rect">
             <a:avLst/>
@@ -1927,8 +1927,8 @@
         </p:nvSpPr>
         <p:spPr>
           <a:xfrm>
-            <a:off x="4998568" y="3429000"/>
-            <a:ext cx="2194560" cy="640080"/>
+            <a:off x="5181448" y="3337560"/>
+            <a:ext cx="1828800" cy="594360"/>
           </a:xfrm>
           <a:prstGeom prst="rect">
             <a:avLst/>
@@ -1963,7 +1963,7 @@
         </p:nvSpPr>
         <p:spPr>
           <a:xfrm>
-            <a:off x="8677427" y="3145536"/>
+            <a:off x="8677427" y="3054096"/>
             <a:ext cx="201168" cy="201168"/>
           </a:xfrm>
           <a:prstGeom prst="ellipse">
@@ -1988,8 +1988,8 @@
         </p:nvSpPr>
         <p:spPr>
           <a:xfrm>
-            <a:off x="8046491" y="2862072"/>
-            <a:ext cx="1463040" cy="228600"/>
+            <a:off x="7863611" y="2788920"/>
+            <a:ext cx="1828800" cy="228600"/>
           </a:xfrm>
           <a:prstGeom prst="rect">
             <a:avLst/>
@@ -2024,8 +2024,8 @@
         </p:nvSpPr>
         <p:spPr>
           <a:xfrm>
-            <a:off x="7680731" y="3429000"/>
-            <a:ext cx="2194560" cy="640080"/>
+            <a:off x="7863611" y="3337560"/>
+            <a:ext cx="1828800" cy="594360"/>
           </a:xfrm>
           <a:prstGeom prst="rect">
             <a:avLst/>
@@ -2060,7 +2060,7 @@
         </p:nvSpPr>
         <p:spPr>
           <a:xfrm>
-            <a:off x="11359591" y="3145536"/>
+            <a:off x="11359591" y="3054096"/>
             <a:ext cx="201168" cy="201168"/>
           </a:xfrm>
           <a:prstGeom prst="ellipse">
@@ -2085,8 +2085,8 @@
         </p:nvSpPr>
         <p:spPr>
           <a:xfrm>
-            <a:off x="10728655" y="2862072"/>
-            <a:ext cx="1463040" cy="228600"/>
+            <a:off x="9905695" y="2788920"/>
+            <a:ext cx="1828800" cy="228600"/>
           </a:xfrm>
           <a:prstGeom prst="rect">
             <a:avLst/>
@@ -2098,7 +2098,7 @@
           <a:bodyPr wrap="square" lIns="0" tIns="0" rIns="0" bIns="0" rtlCol="0" anchor="t"/>
           <a:lstStyle/>
           <a:p>
-            <a:pPr algn="ctr" indent="0" marL="0">
+            <a:pPr algn="r" indent="0" marL="0">
               <a:buNone/>
             </a:pPr>
             <a:r>
@@ -2121,8 +2121,8 @@
         </p:nvSpPr>
         <p:spPr>
           <a:xfrm>
-            <a:off x="10362895" y="3429000"/>
-            <a:ext cx="2194560" cy="640080"/>
+            <a:off x="9905695" y="3337560"/>
+            <a:ext cx="1828800" cy="594360"/>
           </a:xfrm>
           <a:prstGeom prst="rect">
             <a:avLst/>
@@ -2134,7 +2134,7 @@
           <a:bodyPr wrap="square" lIns="0" tIns="0" rIns="0" bIns="0" rtlCol="0" anchor="t"/>
           <a:lstStyle/>
           <a:p>
-            <a:pPr algn="ctr" indent="0" marL="0">
+            <a:pPr algn="r" indent="0" marL="0">
               <a:buNone/>
             </a:pPr>
             <a:r>
@@ -2157,7 +2157,7 @@
         </p:nvSpPr>
         <p:spPr>
           <a:xfrm>
-            <a:off x="457200" y="4297680"/>
+            <a:off x="457200" y="4114800"/>
             <a:ext cx="5486400" cy="228600"/>
           </a:xfrm>
           <a:prstGeom prst="rect">
@@ -2193,8 +2193,8 @@
         </p:nvSpPr>
         <p:spPr>
           <a:xfrm>
-            <a:off x="457200" y="4553712"/>
-            <a:ext cx="5486400" cy="1051560"/>
+            <a:off x="457200" y="4370832"/>
+            <a:ext cx="5486400" cy="868680"/>
           </a:xfrm>
           <a:prstGeom prst="rect">
             <a:avLst/>
@@ -2229,7 +2229,7 @@
         </p:nvSpPr>
         <p:spPr>
           <a:xfrm>
-            <a:off x="457200" y="5669280"/>
+            <a:off x="457200" y="5349240"/>
             <a:ext cx="5486400" cy="228600"/>
           </a:xfrm>
           <a:prstGeom prst="rect">
@@ -2265,7 +2265,7 @@
         </p:nvSpPr>
         <p:spPr>
           <a:xfrm>
-            <a:off x="457200" y="5925312"/>
+            <a:off x="457200" y="5605272"/>
             <a:ext cx="5486400" cy="640080"/>
           </a:xfrm>
           <a:prstGeom prst="rect">
@@ -2301,7 +2301,7 @@
         </p:nvSpPr>
         <p:spPr>
           <a:xfrm>
-            <a:off x="6263640" y="4297680"/>
+            <a:off x="6263640" y="4114800"/>
             <a:ext cx="5470855" cy="228600"/>
           </a:xfrm>
           <a:prstGeom prst="rect">
@@ -2344,7 +2344,7 @@
           </p:nvPr>
         </p:nvGraphicFramePr>
         <p:xfrm>
-          <a:off x="6263640" y="4572000"/>
+          <a:off x="6263640" y="4389120"/>
           <a:ext cx="5470855" cy="914400"/>
         </p:xfrm>
         <a:graphic>
@@ -2352,10 +2352,10 @@
             <a:tbl>
               <a:tblPr/>
               <a:tblGrid>
-                <a:gridCol w="2743200"/>
-                <a:gridCol w="1143000"/>
-                <a:gridCol w="640080"/>
-                <a:gridCol w="944575"/>
+                <a:gridCol w="2606040"/>
+                <a:gridCol w="1097280"/>
+                <a:gridCol w="594360"/>
+                <a:gridCol w="1173175"/>
               </a:tblGrid>
               <a:tr h="274320">
                 <a:tc>
